--- a/PPTs/L2-Processes Threads.pptx
+++ b/PPTs/L2-Processes Threads.pptx
@@ -975,7 +975,7 @@
             </a:pPr>
             <a:r>
               <a:rPr lang="en-GB" dirty="0"/>
-              <a:t>It will reap any terminated child arbitrarily. process (preventing it from becoming a zombie process</a:t>
+              <a:t>It will reap any terminated child (chosen arbitrarily), preventing it from becoming a zombie process.</a:t>
             </a:r>
           </a:p>
           <a:p>
@@ -1629,42 +1629,6 @@
           <a:bodyPr/>
           <a:lstStyle/>
           <a:p>
-            <a:r>
-              <a:rPr lang="en-GB" dirty="0"/>
-              <a:t>In Child process: exec() replaces the current process image with a new program called SOME_COMMAND. The child process will execute the command and terminate. The code following it (e.g., </a:t>
-            </a:r>
-            <a:r>
-              <a:rPr lang="en-GB" dirty="0" err="1"/>
-              <a:t>printf</a:t>
-            </a:r>
-            <a:r>
-              <a:rPr lang="en-GB" dirty="0"/>
-              <a:t>("Child\n")) will not be executed because it is now running</a:t>
-            </a:r>
-            <a:r>
-              <a:rPr lang="en-US" altLang="zh-CN" dirty="0"/>
-              <a:t> </a:t>
-            </a:r>
-            <a:r>
-              <a:rPr lang="en-GB" dirty="0"/>
-              <a:t>SOME_COMMAND, not the code shown in the text box.</a:t>
-            </a:r>
-          </a:p>
-          <a:p>
-            <a:pPr marL="287020" marR="2613025" indent="-274955">
-              <a:lnSpc>
-                <a:spcPts val="2310"/>
-              </a:lnSpc>
-              <a:spcBef>
-                <a:spcPts val="195"/>
-              </a:spcBef>
-            </a:pPr>
-            <a:endParaRPr lang="en-GB" sz="1200" dirty="0">
-              <a:latin typeface="Arial MT"/>
-              <a:cs typeface="Arial MT"/>
-            </a:endParaRPr>
-          </a:p>
-          <a:p>
             <a:pPr marL="287020" marR="2613025" indent="-274955">
               <a:lnSpc>
                 <a:spcPts val="2310"/>
@@ -6218,7 +6182,7 @@
               <a:rPr lang="en-US" altLang="en-SE" dirty="0" err="1">
                 <a:latin typeface="Courier New" panose="02070309020205020404" pitchFamily="49" charset="0"/>
               </a:rPr>
-              <a:t>pthread_signal</a:t>
+              <a:t>pthread_cond_signal</a:t>
             </a:r>
             <a:r>
               <a:rPr lang="en-US" altLang="en-SE" dirty="0">
@@ -6274,7 +6238,7 @@
               <a:rPr lang="en-US" altLang="en-SE" dirty="0" err="1">
                 <a:latin typeface="Courier New" panose="02070309020205020404" pitchFamily="49" charset="0"/>
               </a:rPr>
-              <a:t>pthread_wait</a:t>
+              <a:t>pthread_join</a:t>
             </a:r>
             <a:r>
               <a:rPr lang="en-US" altLang="en-SE" dirty="0">
@@ -11068,7 +11032,12 @@
             <p:ph type="title"/>
           </p:nvPr>
         </p:nvSpPr>
-        <p:spPr/>
+        <p:spPr>
+          <a:xfrm>
+            <a:off x="1320800" y="152400"/>
+            <a:ext cx="9550400" cy="533400"/>
+          </a:xfrm>
+        </p:spPr>
         <p:txBody>
           <a:bodyPr/>
           <a:lstStyle/>
@@ -12945,7 +12914,12 @@
             <p:ph type="title"/>
           </p:nvPr>
         </p:nvSpPr>
-        <p:spPr/>
+        <p:spPr>
+          <a:xfrm>
+            <a:off x="1320800" y="152400"/>
+            <a:ext cx="9550400" cy="533400"/>
+          </a:xfrm>
+        </p:spPr>
         <p:txBody>
           <a:bodyPr/>
           <a:lstStyle/>
@@ -13962,7 +13936,12 @@
             <p:ph type="title"/>
           </p:nvPr>
         </p:nvSpPr>
-        <p:spPr/>
+        <p:spPr>
+          <a:xfrm>
+            <a:off x="1320800" y="152400"/>
+            <a:ext cx="9550400" cy="533400"/>
+          </a:xfrm>
+        </p:spPr>
         <p:txBody>
           <a:bodyPr/>
           <a:lstStyle/>
@@ -14121,7 +14100,7 @@
                   <a:srgbClr val="BA2121"/>
                 </a:solidFill>
               </a:rPr>
-              <a:t>"hello world (ret:%d)</a:t>
+              <a:t>"hello world (pid:%d)</a:t>
             </a:r>
             <a:r>
               <a:rPr lang="en-US" altLang="zh-CN" sz="1600" b="1" dirty="0">
@@ -14680,7 +14659,7 @@
                   <a:srgbClr val="3D7B7B"/>
                 </a:solidFill>
               </a:rPr>
-              <a:t>wc</a:t>
+              <a:t>cpid</a:t>
             </a:r>
             <a:r>
               <a:rPr lang="en-US" altLang="zh-CN" sz="1600" i="1" dirty="0">
@@ -14688,7 +14667,7 @@
                   <a:srgbClr val="3D7B7B"/>
                 </a:solidFill>
               </a:rPr>
-              <a:t> (wait child) stores </a:t>
+              <a:t> (child pid) stores </a:t>
             </a:r>
             <a:r>
               <a:rPr lang="en-US" altLang="zh-CN" sz="1600" i="1" dirty="0" err="1">
@@ -14785,7 +14764,7 @@
             </a:r>
             <a:r>
               <a:rPr lang="en-US" altLang="zh-CN" sz="1600" dirty="0" err="1"/>
-              <a:t>wc</a:t>
+              <a:t>cpid</a:t>
             </a:r>
             <a:r>
               <a:rPr lang="en-US" altLang="zh-CN" sz="1600" dirty="0"/>
@@ -15574,7 +15553,12 @@
             <p:ph type="title"/>
           </p:nvPr>
         </p:nvSpPr>
-        <p:spPr/>
+        <p:spPr>
+          <a:xfrm>
+            <a:off x="1320800" y="152400"/>
+            <a:ext cx="9550400" cy="533400"/>
+          </a:xfrm>
+        </p:spPr>
         <p:txBody>
           <a:bodyPr/>
           <a:lstStyle/>
@@ -15689,7 +15673,7 @@
             </a:r>
             <a:r>
               <a:rPr lang="en-US" altLang="zh-CN" dirty="0"/>
-              <a:t>child runs first, and parents waits for child to finish</a:t>
+              <a:t>child runs first, and the parent waits for the child to finish</a:t>
             </a:r>
             <a:endParaRPr lang="en-US" dirty="0"/>
           </a:p>
@@ -15952,7 +15936,12 @@
             <p:ph type="title"/>
           </p:nvPr>
         </p:nvSpPr>
-        <p:spPr/>
+        <p:spPr>
+          <a:xfrm>
+            <a:off x="1320800" y="152400"/>
+            <a:ext cx="9550400" cy="533400"/>
+          </a:xfrm>
+        </p:spPr>
         <p:txBody>
           <a:bodyPr/>
           <a:lstStyle/>
@@ -16066,7 +16055,7 @@
             </a:r>
             <a:r>
               <a:rPr lang="en-US" altLang="zh-CN" dirty="0"/>
-              <a:t>return.</a:t>
+              <a:t>return on success (it returns -1 only on error).</a:t>
             </a:r>
             <a:r>
               <a:rPr lang="zh-CN" altLang="en-US" dirty="0"/>
@@ -16520,8 +16509,8 @@
         </p:nvSpPr>
         <p:spPr>
           <a:xfrm>
-            <a:off x="431024" y="216764"/>
-            <a:ext cx="7740703" cy="532956"/>
+            <a:off x="1320800" y="152400"/>
+            <a:ext cx="9550400" cy="533400"/>
           </a:xfrm>
         </p:spPr>
         <p:txBody>
@@ -16988,7 +16977,7 @@
             </a:r>
             <a:r>
               <a:rPr lang="en-US" altLang="zh-CN" sz="1400" dirty="0" err="1"/>
-              <a:t>pid</a:t>
+              <a:t>ret</a:t>
             </a:r>
             <a:r>
               <a:rPr lang="en-US" altLang="zh-CN" sz="1400" dirty="0">
@@ -17255,7 +17244,7 @@
                   <a:srgbClr val="BA2121"/>
                 </a:solidFill>
               </a:rPr>
-              <a:t>“</a:t>
+              <a:t>"</a:t>
             </a:r>
             <a:r>
               <a:rPr lang="en-US" altLang="zh-CN" sz="1400" dirty="0" err="1">
@@ -17271,7 +17260,7 @@
                   <a:srgbClr val="BA2121"/>
                 </a:solidFill>
               </a:rPr>
-              <a:t>”</a:t>
+              <a:t>"</a:t>
             </a:r>
             <a:r>
               <a:rPr lang="en-US" altLang="zh-CN" sz="1400" dirty="0"/>
@@ -17299,7 +17288,7 @@
                   <a:srgbClr val="3D7B7B"/>
                 </a:solidFill>
               </a:rPr>
-              <a:t>// program: ”</a:t>
+              <a:t>// program: "</a:t>
             </a:r>
             <a:r>
               <a:rPr lang="en-US" altLang="zh-CN" sz="1400" i="1" dirty="0" err="1">
@@ -17315,7 +17304,7 @@
                   <a:srgbClr val="3D7B7B"/>
                 </a:solidFill>
               </a:rPr>
-              <a:t>“ (word</a:t>
+              <a:t>" (word</a:t>
             </a:r>
             <a:r>
               <a:rPr lang="zh-CN" altLang="en-US" sz="1400" i="1" dirty="0">
@@ -17404,7 +17393,7 @@
                   <a:srgbClr val="BA2121"/>
                 </a:solidFill>
               </a:rPr>
-              <a:t>“p3.c”</a:t>
+              <a:t>"p3.c"</a:t>
             </a:r>
             <a:r>
               <a:rPr lang="en-US" altLang="zh-CN" sz="1400" dirty="0"/>
@@ -17632,7 +17621,7 @@
                   <a:srgbClr val="BA2121"/>
                 </a:solidFill>
               </a:rPr>
-              <a:t>“This line will never be executed."</a:t>
+              <a:t>"This line will never be executed."</a:t>
             </a:r>
             <a:r>
               <a:rPr lang="en-US" altLang="zh-CN" sz="1400" dirty="0"/>
@@ -17767,7 +17756,7 @@
                   <a:srgbClr val="BA2121"/>
                 </a:solidFill>
               </a:rPr>
-              <a:t>“hello, I am parent of %d (</a:t>
+              <a:t>"hello, I am parent of %d (</a:t>
             </a:r>
             <a:r>
               <a:rPr lang="en-US" altLang="zh-CN" sz="1400" dirty="0" err="1">
@@ -17783,7 +17772,7 @@
                   <a:srgbClr val="BA2121"/>
                 </a:solidFill>
               </a:rPr>
-              <a:t>:%d) (pid:%d)\n”</a:t>
+              <a:t>:%d) (pid:%d)\n"</a:t>
             </a:r>
             <a:r>
               <a:rPr lang="en-US" altLang="zh-CN" sz="1400" dirty="0"/>
@@ -18222,7 +18211,7 @@
             </a:r>
             <a:r>
               <a:rPr lang="en-GB" altLang="zh-CN" sz="1800" b="0" kern="0" dirty="0" err="1"/>
-              <a:t>rc</a:t>
+              <a:t>ret</a:t>
             </a:r>
             <a:r>
               <a:rPr lang="en-GB" altLang="zh-CN" sz="1800" b="0" kern="0" dirty="0"/>
@@ -18242,7 +18231,7 @@
             </a:r>
             <a:r>
               <a:rPr lang="en-GB" altLang="zh-CN" sz="1800" b="0" kern="0" dirty="0"/>
-              <a:t>“, a program that counts Lines, Words, and Bytes in a file, with output format: [lines] [words] [bytes] [filename].</a:t>
+              <a:t>”, a program that counts lines, words, and bytes in a file, with output format: [lines] [words] [bytes] [filename].</a:t>
             </a:r>
           </a:p>
           <a:p>
@@ -18252,7 +18241,7 @@
             </a:r>
             <a:r>
               <a:rPr lang="en-GB" altLang="zh-CN" sz="1800" b="0" kern="0" dirty="0" err="1"/>
-              <a:t>args</a:t>
+              <a:t>myargs</a:t>
             </a:r>
             <a:r>
               <a:rPr lang="en-GB" altLang="zh-CN" sz="1800" b="0" kern="0" dirty="0"/>
@@ -18298,11 +18287,11 @@
                   <a:srgbClr val="C00000"/>
                 </a:solidFill>
               </a:rPr>
-              <a:t>(“This line will never be executed."</a:t>
+              <a:t>("This line will never be executed."</a:t>
             </a:r>
             <a:r>
               <a:rPr lang="en-GB" altLang="zh-CN" sz="1800" b="0" kern="0" dirty="0"/>
-              <a:t>);“ will never be executed. </a:t>
+              <a:t>);” will never be executed. </a:t>
             </a:r>
           </a:p>
           <a:p>
@@ -18391,14 +18380,19 @@
             <p:ph type="title"/>
           </p:nvPr>
         </p:nvSpPr>
-        <p:spPr/>
+        <p:spPr>
+          <a:xfrm>
+            <a:off x="1320800" y="152400"/>
+            <a:ext cx="9550400" cy="533400"/>
+          </a:xfrm>
+        </p:spPr>
         <p:txBody>
           <a:bodyPr/>
           <a:lstStyle/>
           <a:p>
             <a:r>
               <a:rPr lang="en-US" dirty="0"/>
-              <a:t>IO redirection and pipe </a:t>
+              <a:t>I/O redirection and pipe </a:t>
             </a:r>
           </a:p>
         </p:txBody>
@@ -18465,7 +18459,7 @@
             </a:r>
             <a:r>
               <a:rPr lang="en-US" altLang="ko-KR" b="1" u="sng" dirty="0"/>
-              <a:t>make the IO </a:t>
+              <a:t>make the I/O </a:t>
             </a:r>
             <a:r>
               <a:rPr lang="en-US" altLang="zh-CN" b="1" u="sng" dirty="0"/>
@@ -18484,7 +18478,7 @@
             <a:pPr lvl="1"/>
             <a:r>
               <a:rPr lang="en-US" altLang="ko-KR" sz="2000" dirty="0"/>
-              <a:t>IO redirection: output of the left command redirected to be written to the file on the right</a:t>
+              <a:t>I/O redirection: output of the left command redirected to be written to the file on the right</a:t>
             </a:r>
           </a:p>
           <a:p>
@@ -18702,7 +18696,7 @@
         </p:nvSpPr>
         <p:spPr>
           <a:xfrm>
-            <a:off x="2931183" y="3572375"/>
+            <a:off x="2931183" y="3747375"/>
             <a:ext cx="4582737" cy="473976"/>
           </a:xfrm>
           <a:prstGeom prst="rect">
@@ -18918,7 +18912,12 @@
             <p:ph type="title"/>
           </p:nvPr>
         </p:nvSpPr>
-        <p:spPr/>
+        <p:spPr>
+          <a:xfrm>
+            <a:off x="1320800" y="152400"/>
+            <a:ext cx="9550400" cy="533400"/>
+          </a:xfrm>
+        </p:spPr>
         <p:txBody>
           <a:bodyPr/>
           <a:lstStyle/>
@@ -19810,7 +19809,12 @@
             <p:ph type="title"/>
           </p:nvPr>
         </p:nvSpPr>
-        <p:spPr/>
+        <p:spPr>
+          <a:xfrm>
+            <a:off x="1320800" y="152400"/>
+            <a:ext cx="9550400" cy="533400"/>
+          </a:xfrm>
+        </p:spPr>
         <p:txBody>
           <a:bodyPr/>
           <a:lstStyle/>
@@ -19965,7 +19969,12 @@
             <p:ph type="title"/>
           </p:nvPr>
         </p:nvSpPr>
-        <p:spPr/>
+        <p:spPr>
+          <a:xfrm>
+            <a:off x="1320800" y="152400"/>
+            <a:ext cx="9550400" cy="533400"/>
+          </a:xfrm>
+        </p:spPr>
         <p:txBody>
           <a:bodyPr/>
           <a:lstStyle/>
@@ -20090,7 +20099,7 @@
             </a:r>
             <a:r>
               <a:rPr lang="en-US" altLang="zh-CN" dirty="0" err="1"/>
-              <a:t>ps</a:t>
+              <a:t>ps ax</a:t>
             </a:r>
             <a:r>
               <a:rPr lang="zh-CN" altLang="en-US" dirty="0"/>
@@ -20122,7 +20131,7 @@
             </a:r>
             <a:r>
               <a:rPr lang="en-US" altLang="zh-CN" dirty="0"/>
-              <a:t>processes as a flat list)</a:t>
+              <a:t>processes as a flat list; plain “ps” shows only the current terminal’s processes)</a:t>
             </a:r>
             <a:endParaRPr lang="en-US" dirty="0"/>
           </a:p>
@@ -20233,7 +20242,12 @@
             <p:ph type="title"/>
           </p:nvPr>
         </p:nvSpPr>
-        <p:spPr/>
+        <p:spPr>
+          <a:xfrm>
+            <a:off x="1320800" y="152400"/>
+            <a:ext cx="9550400" cy="533400"/>
+          </a:xfrm>
+        </p:spPr>
         <p:txBody>
           <a:bodyPr/>
           <a:lstStyle/>
@@ -20338,7 +20352,7 @@
             </a:r>
             <a:r>
               <a:rPr lang="en-US" altLang="zh-CN" dirty="0"/>
-              <a:t>phic</a:t>
+              <a:t>phical</a:t>
             </a:r>
             <a:r>
               <a:rPr lang="zh-CN" altLang="en-US" dirty="0"/>
@@ -20486,7 +20500,12 @@
             <p:ph type="title"/>
           </p:nvPr>
         </p:nvSpPr>
-        <p:spPr/>
+        <p:spPr>
+          <a:xfrm>
+            <a:off x="1320800" y="152400"/>
+            <a:ext cx="9550400" cy="533400"/>
+          </a:xfrm>
+        </p:spPr>
         <p:txBody>
           <a:bodyPr/>
           <a:lstStyle/>
@@ -20956,7 +20975,12 @@
             <p:ph type="title"/>
           </p:nvPr>
         </p:nvSpPr>
-        <p:spPr/>
+        <p:spPr>
+          <a:xfrm>
+            <a:off x="1320800" y="152400"/>
+            <a:ext cx="9550400" cy="533400"/>
+          </a:xfrm>
+        </p:spPr>
         <p:txBody>
           <a:bodyPr/>
           <a:lstStyle/>
@@ -21661,7 +21685,12 @@
             <p:ph type="title"/>
           </p:nvPr>
         </p:nvSpPr>
-        <p:spPr/>
+        <p:spPr>
+          <a:xfrm>
+            <a:off x="1320800" y="152400"/>
+            <a:ext cx="9550400" cy="533400"/>
+          </a:xfrm>
+        </p:spPr>
         <p:txBody>
           <a:bodyPr/>
           <a:lstStyle/>
@@ -21937,7 +21966,7 @@
             </a:r>
             <a:r>
               <a:rPr lang="en-US" altLang="zh-CN" dirty="0"/>
-              <a:t>command</a:t>
+              <a:t>program</a:t>
             </a:r>
           </a:p>
           <a:p>
@@ -22094,7 +22123,7 @@
             </a:pPr>
             <a:r>
               <a:rPr lang="en-US" altLang="en-SE" sz="2400" dirty="0"/>
-              <a:t>Registers, IP</a:t>
+              <a:t>Registers, PC</a:t>
             </a:r>
           </a:p>
           <a:p>
@@ -22605,7 +22634,7 @@
                 <a:ea typeface="黑体" panose="02010609060101010101" pitchFamily="49" charset="-122"/>
                 <a:cs typeface="+mn-cs"/>
               </a:rPr>
-              <a:t>disk IO</a:t>
+              <a:t>disk I/O</a:t>
             </a:r>
             <a:endParaRPr lang="en-US" sz="1600" b="0" dirty="0">
               <a:solidFill>
@@ -24258,7 +24287,7 @@
           <a:p>
             <a:r>
               <a:rPr lang="en-US" altLang="en-SE"/>
-              <a:t>(dynamic allocated mem)</a:t>
+              <a:t>(temporary data)</a:t>
             </a:r>
           </a:p>
         </p:txBody>
@@ -26409,7 +26438,12 @@
             <p:ph type="title"/>
           </p:nvPr>
         </p:nvSpPr>
-        <p:spPr/>
+        <p:spPr>
+          <a:xfrm>
+            <a:off x="1320800" y="152400"/>
+            <a:ext cx="9550400" cy="533400"/>
+          </a:xfrm>
+        </p:spPr>
         <p:txBody>
           <a:bodyPr/>
           <a:lstStyle/>
@@ -30701,31 +30735,6 @@
       </p:sp>
       <p:sp>
         <p:nvSpPr>
-          <p:cNvPr id="3" name="Content Placeholder 2">
-            <a:extLst>
-              <a:ext uri="{FF2B5EF4-FFF2-40B4-BE49-F238E27FC236}">
-                <a16:creationId xmlns:a16="http://schemas.microsoft.com/office/drawing/2014/main" id="{5CA52BE5-3D81-086A-8387-A3E618CD694E}"/>
-              </a:ext>
-            </a:extLst>
-          </p:cNvPr>
-          <p:cNvSpPr>
-            <a:spLocks noGrp="1"/>
-          </p:cNvSpPr>
-          <p:nvPr>
-            <p:ph idx="1"/>
-          </p:nvPr>
-        </p:nvSpPr>
-        <p:spPr/>
-        <p:txBody>
-          <a:bodyPr/>
-          <a:lstStyle/>
-          <a:p>
-            <a:endParaRPr lang="en-SE"/>
-          </a:p>
-        </p:txBody>
-      </p:sp>
-      <p:sp>
-        <p:nvSpPr>
           <p:cNvPr id="4" name="Rectangle 2">
             <a:extLst>
               <a:ext uri="{FF2B5EF4-FFF2-40B4-BE49-F238E27FC236}">
@@ -33047,7 +33056,7 @@
             <a:pPr lvl="2"/>
             <a:r>
               <a:rPr lang="en-US" altLang="en-SE" dirty="0"/>
-              <a:t>the Linux </a:t>
+              <a:t>a user-level </a:t>
             </a:r>
             <a:r>
               <a:rPr lang="en-US" altLang="en-SE" dirty="0">
@@ -33059,7 +33068,7 @@
             </a:r>
             <a:r>
               <a:rPr lang="en-US" altLang="en-SE" dirty="0"/>
-              <a:t> multiplexes user-level threads on top of kernel thread(s), which it treats as “virtual processors”</a:t>
+              <a:t> (e.g., early Java “green threads”) multiplexes user-level threads on top of kernel thread(s), which it treats as “virtual processors”</a:t>
             </a:r>
           </a:p>
           <a:p>
@@ -33905,7 +33914,7 @@
             </a:r>
             <a:r>
               <a:rPr lang="en-US" altLang="zh-CN" dirty="0"/>
-              <a:t>command</a:t>
+              <a:t>program</a:t>
             </a:r>
           </a:p>
           <a:p>
@@ -34157,7 +34166,12 @@
             <p:ph type="title"/>
           </p:nvPr>
         </p:nvSpPr>
-        <p:spPr/>
+        <p:spPr>
+          <a:xfrm>
+            <a:off x="1320800" y="152400"/>
+            <a:ext cx="9550400" cy="533400"/>
+          </a:xfrm>
+        </p:spPr>
         <p:txBody>
           <a:bodyPr/>
           <a:lstStyle/>
@@ -34421,7 +34435,7 @@
             </a:r>
             <a:r>
               <a:rPr lang="en-US" altLang="zh-CN" dirty="0"/>
-              <a:t>counter)</a:t>
+              <a:t>Counter)</a:t>
             </a:r>
             <a:endParaRPr lang="en-GB" altLang="zh-CN" dirty="0"/>
           </a:p>
@@ -35634,7 +35648,12 @@
             <p:ph type="title"/>
           </p:nvPr>
         </p:nvSpPr>
-        <p:spPr/>
+        <p:spPr>
+          <a:xfrm>
+            <a:off x="1320800" y="152400"/>
+            <a:ext cx="9550400" cy="533400"/>
+          </a:xfrm>
+        </p:spPr>
         <p:txBody>
           <a:bodyPr/>
           <a:lstStyle/>
@@ -35857,7 +35876,7 @@
             <a:pPr lvl="1"/>
             <a:r>
               <a:rPr lang="en-US" altLang="zh-CN" dirty="0"/>
-              <a:t>PCB in XV6 does not include pointers to child processes for simplicity, but PCB in Linux include them for convenient references to its child processes</a:t>
+              <a:t>PCB in XV6 does not include pointers to child processes for simplicity, but PCB in Linux includes them for convenient references to its child processes</a:t>
             </a:r>
           </a:p>
           <a:p>
@@ -36931,7 +36950,12 @@
             <p:ph type="title"/>
           </p:nvPr>
         </p:nvSpPr>
-        <p:spPr/>
+        <p:spPr>
+          <a:xfrm>
+            <a:off x="1320800" y="152400"/>
+            <a:ext cx="9550400" cy="533400"/>
+          </a:xfrm>
+        </p:spPr>
         <p:txBody>
           <a:bodyPr/>
           <a:lstStyle/>
@@ -37022,55 +37046,55 @@
             <a:pPr lvl="2"/>
             <a:r>
               <a:rPr lang="en-US" altLang="zh-CN" dirty="0"/>
-              <a:t>Ready</a:t>
-            </a:r>
-            <a:r>
-              <a:rPr lang="zh-CN" altLang="en-US" dirty="0"/>
-              <a:t> </a:t>
-            </a:r>
-            <a:r>
-              <a:rPr lang="en-US" altLang="zh-CN" dirty="0"/>
-              <a:t>to</a:t>
-            </a:r>
-            <a:r>
-              <a:rPr lang="zh-CN" altLang="en-US" dirty="0"/>
-              <a:t> </a:t>
-            </a:r>
-            <a:r>
-              <a:rPr lang="en-US" altLang="zh-CN" dirty="0"/>
-              <a:t>run</a:t>
-            </a:r>
-            <a:r>
-              <a:rPr lang="zh-CN" altLang="en-US" dirty="0"/>
-              <a:t> </a:t>
-            </a:r>
-            <a:r>
-              <a:rPr lang="en-US" altLang="zh-CN" dirty="0"/>
-              <a:t>and</a:t>
-            </a:r>
-            <a:r>
-              <a:rPr lang="zh-CN" altLang="en-US" dirty="0"/>
-              <a:t> </a:t>
-            </a:r>
-            <a:r>
-              <a:rPr lang="en-US" altLang="zh-CN" dirty="0"/>
-              <a:t>pending</a:t>
-            </a:r>
-            <a:r>
-              <a:rPr lang="zh-CN" altLang="en-US" dirty="0"/>
-              <a:t> </a:t>
-            </a:r>
-            <a:r>
-              <a:rPr lang="en-US" altLang="zh-CN" dirty="0"/>
-              <a:t>for</a:t>
-            </a:r>
-            <a:r>
-              <a:rPr lang="zh-CN" altLang="en-US" dirty="0"/>
-              <a:t> </a:t>
-            </a:r>
-            <a:r>
-              <a:rPr lang="en-US" altLang="zh-CN" dirty="0"/>
-              <a:t>running</a:t>
+              <a:t>Ready to run, waiting to be scheduled onto the CPU</a:t>
+            </a:r>
+            <a:r>
+              <a:rPr lang="zh-CN" altLang="en-US" dirty="0"/>
+              <a:t/>
+            </a:r>
+            <a:r>
+              <a:rPr lang="en-US" altLang="zh-CN" dirty="0"/>
+              <a:t/>
+            </a:r>
+            <a:r>
+              <a:rPr lang="zh-CN" altLang="en-US" dirty="0"/>
+              <a:t/>
+            </a:r>
+            <a:r>
+              <a:rPr lang="en-US" altLang="zh-CN" dirty="0"/>
+              <a:t/>
+            </a:r>
+            <a:r>
+              <a:rPr lang="zh-CN" altLang="en-US" dirty="0"/>
+              <a:t/>
+            </a:r>
+            <a:r>
+              <a:rPr lang="en-US" altLang="zh-CN" dirty="0"/>
+              <a:t/>
+            </a:r>
+            <a:r>
+              <a:rPr lang="zh-CN" altLang="en-US" dirty="0"/>
+              <a:t/>
+            </a:r>
+            <a:r>
+              <a:rPr lang="en-US" altLang="zh-CN" dirty="0"/>
+              <a:t/>
+            </a:r>
+            <a:r>
+              <a:rPr lang="zh-CN" altLang="en-US" dirty="0"/>
+              <a:t/>
+            </a:r>
+            <a:r>
+              <a:rPr lang="en-US" altLang="zh-CN" dirty="0"/>
+              <a:t/>
+            </a:r>
+            <a:r>
+              <a:rPr lang="zh-CN" altLang="en-US" dirty="0"/>
+              <a:t/>
+            </a:r>
+            <a:r>
+              <a:rPr lang="en-US" altLang="zh-CN" dirty="0"/>
+              <a:t/>
             </a:r>
           </a:p>
           <a:p>
@@ -37088,31 +37112,31 @@
             <a:pPr lvl="2"/>
             <a:r>
               <a:rPr lang="en-US" altLang="zh-CN" dirty="0"/>
-              <a:t>Being</a:t>
-            </a:r>
-            <a:r>
-              <a:rPr lang="zh-CN" altLang="en-US" dirty="0"/>
-              <a:t> </a:t>
-            </a:r>
-            <a:r>
-              <a:rPr lang="en-US" altLang="zh-CN" dirty="0"/>
-              <a:t>executed</a:t>
-            </a:r>
-            <a:r>
-              <a:rPr lang="zh-CN" altLang="en-US" dirty="0"/>
-              <a:t> </a:t>
-            </a:r>
-            <a:r>
-              <a:rPr lang="en-US" altLang="zh-CN" dirty="0"/>
-              <a:t>by</a:t>
-            </a:r>
-            <a:r>
-              <a:rPr lang="zh-CN" altLang="en-US" dirty="0"/>
-              <a:t> </a:t>
-            </a:r>
-            <a:r>
-              <a:rPr lang="en-US" altLang="zh-CN" dirty="0"/>
-              <a:t>OS</a:t>
+              <a:t>Being executed on the CPU</a:t>
+            </a:r>
+            <a:r>
+              <a:rPr lang="zh-CN" altLang="en-US" dirty="0"/>
+              <a:t/>
+            </a:r>
+            <a:r>
+              <a:rPr lang="en-US" altLang="zh-CN" dirty="0"/>
+              <a:t/>
+            </a:r>
+            <a:r>
+              <a:rPr lang="zh-CN" altLang="en-US" dirty="0"/>
+              <a:t/>
+            </a:r>
+            <a:r>
+              <a:rPr lang="en-US" altLang="zh-CN" dirty="0"/>
+              <a:t/>
+            </a:r>
+            <a:r>
+              <a:rPr lang="zh-CN" altLang="en-US" dirty="0"/>
+              <a:t/>
+            </a:r>
+            <a:r>
+              <a:rPr lang="en-US" altLang="zh-CN" dirty="0"/>
+              <a:t/>
             </a:r>
           </a:p>
           <a:p>
@@ -39322,7 +39346,12 @@
             <p:ph type="title"/>
           </p:nvPr>
         </p:nvSpPr>
-        <p:spPr/>
+        <p:spPr>
+          <a:xfrm>
+            <a:off x="1320800" y="152400"/>
+            <a:ext cx="9550400" cy="533400"/>
+          </a:xfrm>
+        </p:spPr>
         <p:txBody>
           <a:bodyPr/>
           <a:lstStyle/>
@@ -39595,23 +39624,23 @@
             <a:pPr lvl="2"/>
             <a:r>
               <a:rPr lang="en-US" altLang="zh-CN" dirty="0"/>
-              <a:t>Kill</a:t>
-            </a:r>
-            <a:r>
-              <a:rPr lang="zh-CN" altLang="en-US" dirty="0"/>
-              <a:t> </a:t>
-            </a:r>
-            <a:r>
-              <a:rPr lang="en-US" altLang="zh-CN" dirty="0"/>
-              <a:t>the</a:t>
-            </a:r>
-            <a:r>
-              <a:rPr lang="zh-CN" altLang="en-US" dirty="0"/>
-              <a:t> </a:t>
-            </a:r>
-            <a:r>
-              <a:rPr lang="en-US" altLang="zh-CN" dirty="0"/>
-              <a:t>processes</a:t>
+              <a:t>Kill (terminate) a process</a:t>
+            </a:r>
+            <a:r>
+              <a:rPr lang="zh-CN" altLang="en-US" dirty="0"/>
+              <a:t/>
+            </a:r>
+            <a:r>
+              <a:rPr lang="en-US" altLang="zh-CN" dirty="0"/>
+              <a:t/>
+            </a:r>
+            <a:r>
+              <a:rPr lang="zh-CN" altLang="en-US" dirty="0"/>
+              <a:t/>
+            </a:r>
+            <a:r>
+              <a:rPr lang="en-US" altLang="zh-CN" dirty="0"/>
+              <a:t/>
             </a:r>
           </a:p>
           <a:p>
@@ -39770,7 +39799,12 @@
             <p:ph type="title"/>
           </p:nvPr>
         </p:nvSpPr>
-        <p:spPr/>
+        <p:spPr>
+          <a:xfrm>
+            <a:off x="1320800" y="152400"/>
+            <a:ext cx="9550400" cy="533400"/>
+          </a:xfrm>
+        </p:spPr>
         <p:txBody>
           <a:bodyPr/>
           <a:lstStyle/>
@@ -40205,8 +40239,8 @@
         </p:nvSpPr>
         <p:spPr>
           <a:xfrm>
-            <a:off x="419449" y="274639"/>
-            <a:ext cx="9117430" cy="532956"/>
+            <a:off x="1320800" y="152400"/>
+            <a:ext cx="9550400" cy="533400"/>
           </a:xfrm>
         </p:spPr>
         <p:txBody>
@@ -40665,7 +40699,7 @@
             </a:r>
             <a:r>
               <a:rPr lang="en-US" altLang="zh-CN" dirty="0"/>
-              <a:t>process,</a:t>
+              <a:t>process.</a:t>
             </a:r>
             <a:r>
               <a:rPr lang="zh-CN" altLang="en-US" dirty="0"/>
@@ -40798,7 +40832,7 @@
           <a:p>
             <a:r>
               <a:rPr lang="en-US" altLang="zh-CN" dirty="0"/>
-              <a:t>Fun analogy: imaging you are a process after fork, but you don’t know if you are the child or parent process, as if you are running inside of a Matrix. But you can identify which process you are running, by looking up to the sky and see the ret value from fork() </a:t>
+              <a:t>Fun analogy: imagine you are a process after fork, but you don’t know if you are the child or parent process, as if you are running inside of a Matrix. But you can identify which process you are running, by looking up at the sky and seeing the ret value from fork() </a:t>
             </a:r>
           </a:p>
           <a:p>
@@ -40888,7 +40922,7 @@
             </a:r>
             <a:r>
               <a:rPr lang="en-US" altLang="zh-CN" dirty="0"/>
-              <a:t>same</a:t>
+              <a:t>the same</a:t>
             </a:r>
           </a:p>
           <a:p>
@@ -40922,7 +40956,7 @@
             </a:r>
             <a:r>
               <a:rPr lang="en-US" altLang="zh-CN" dirty="0"/>
-              <a:t>parents</a:t>
+              <a:t>parent</a:t>
             </a:r>
             <a:r>
               <a:rPr lang="zh-CN" altLang="en-US" dirty="0"/>
@@ -40958,7 +40992,7 @@
                   <a:srgbClr val="0070C0"/>
                 </a:solidFill>
               </a:rPr>
-              <a:t>PIDs,</a:t>
+              <a:t>PIDs and</a:t>
             </a:r>
             <a:r>
               <a:rPr lang="zh-CN" altLang="en-US" b="1" dirty="0">
